--- a/documentation/Presentation.pptx
+++ b/documentation/Presentation.pptx
@@ -2564,6 +2564,17 @@
               <a:buSzPct val="100000"/>
             </a:pPr>
             <a:r>
+              <a:rPr lang="en-US" sz="1400">
+                <a:solidFill>
+                  <a:srgbClr val="1E293B"/>
+                </a:solidFill>
+                <a:latin typeface="Calibri" pitchFamily="34" charset="0"/>
+                <a:ea typeface="Calibri" pitchFamily="34" charset="-122"/>
+                <a:cs typeface="Calibri" pitchFamily="34" charset="-120"/>
+              </a:rPr>
+              <a:t>SHAP was </a:t>
+            </a:r>
+            <a:r>
               <a:rPr lang="en-US" sz="1400" dirty="0">
                 <a:solidFill>
                   <a:srgbClr val="1E293B"/>
@@ -2572,29 +2583,7 @@
                 <a:ea typeface="Calibri" pitchFamily="34" charset="-122"/>
                 <a:cs typeface="Calibri" pitchFamily="34" charset="-120"/>
               </a:rPr>
-              <a:t>SHAP (</a:t>
-            </a:r>
-            <a:r>
-              <a:rPr lang="en-US" sz="1400" dirty="0" err="1">
-                <a:solidFill>
-                  <a:srgbClr val="1E293B"/>
-                </a:solidFill>
-                <a:latin typeface="Calibri" pitchFamily="34" charset="0"/>
-                <a:ea typeface="Calibri" pitchFamily="34" charset="-122"/>
-                <a:cs typeface="Calibri" pitchFamily="34" charset="-120"/>
-              </a:rPr>
-              <a:t>TreeExplainer</a:t>
-            </a:r>
-            <a:r>
-              <a:rPr lang="en-US" sz="1400" dirty="0">
-                <a:solidFill>
-                  <a:srgbClr val="1E293B"/>
-                </a:solidFill>
-                <a:latin typeface="Calibri" pitchFamily="34" charset="0"/>
-                <a:ea typeface="Calibri" pitchFamily="34" charset="-122"/>
-                <a:cs typeface="Calibri" pitchFamily="34" charset="-120"/>
-              </a:rPr>
-              <a:t>) was used because </a:t>
+              <a:t>used because </a:t>
             </a:r>
             <a:r>
               <a:rPr lang="en-US" sz="1400" dirty="0" err="1">

--- a/documentation/Presentation.pptx
+++ b/documentation/Presentation.pptx
@@ -2133,7 +2133,7 @@
                 <a:ea typeface="Calibri" pitchFamily="34" charset="-122"/>
                 <a:cs typeface="Calibri" pitchFamily="34" charset="-120"/>
               </a:rPr>
-              <a:t>[28/07/2026]</a:t>
+              <a:t>[16/09/2026]</a:t>
             </a:r>
             <a:endParaRPr lang="en-US" sz="1400" dirty="0"/>
           </a:p>
